--- a/Archive/Presentations/Boulder_2025/2025_October_Chair_Slides_UDT_CityGML.pptx
+++ b/Archive/Presentations/Boulder_2025/2025_October_Chair_Slides_UDT_CityGML.pptx
@@ -255,7 +255,7 @@
           <a:p>
             <a:fld id="{8028D1E4-4BBA-6F41-9D9B-7C498DFA1119}" type="datetimeFigureOut">
               <a:rPr lang="en-US" smtClean="0"/>
-              <a:t>10/20/2025</a:t>
+              <a:t>10/27/2025</a:t>
             </a:fld>
             <a:endParaRPr lang="en-US"/>
           </a:p>
@@ -432,7 +432,7 @@
           <a:p>
             <a:fld id="{761ABE01-8AD2-744F-9651-CCC9DC857332}" type="datetimeFigureOut">
               <a:rPr lang="en-US" smtClean="0"/>
-              <a:t>10/20/2025</a:t>
+              <a:t>10/27/2025</a:t>
             </a:fld>
             <a:endParaRPr lang="en-US"/>
           </a:p>
@@ -2198,7 +2198,7 @@
             <a:fld id="{1D8BD707-D9CF-40AE-B4C6-C98DA3205C09}" type="datetimeFigureOut">
               <a:rPr lang="en-US" smtClean="0"/>
               <a:pPr/>
-              <a:t>10/20/2025</a:t>
+              <a:t>10/27/2025</a:t>
             </a:fld>
             <a:endParaRPr lang="en-US" dirty="0"/>
           </a:p>
@@ -2596,6 +2596,17 @@
               <a:rPr lang="en-US" dirty="0"/>
             </a:br>
             <a:r>
+              <a:rPr lang="en-US" dirty="0" err="1"/>
+              <a:t>CityGML</a:t>
+            </a:r>
+            <a:r>
+              <a:rPr lang="en-US" dirty="0"/>
+              <a:t> SWG Co-Chair</a:t>
+            </a:r>
+            <a:br>
+              <a:rPr lang="en-US" dirty="0"/>
+            </a:br>
+            <a:r>
               <a:rPr lang="en-US" dirty="0"/>
               <a:t>28 October 2025</a:t>
             </a:r>
@@ -4257,16 +4268,37 @@
           <a:p>
             <a:r>
               <a:rPr lang="en-US" dirty="0"/>
-              <a:t>Chairs: please write a series of bullets to describe what your Working Group does – this should be presented at the beginning of each session</a:t>
-            </a:r>
-          </a:p>
-          <a:p>
-            <a:endParaRPr lang="en-US" dirty="0"/>
-          </a:p>
-          <a:p>
-            <a:r>
-              <a:rPr lang="en-US" dirty="0"/>
-              <a:t>No need to be comprehensive or spend more than a few minutes, consider what you want new attendees to learn</a:t>
+              <a:t>This is a joint meeting of the Urban Digital Twins(UDT) DWG and </a:t>
+            </a:r>
+            <a:r>
+              <a:rPr lang="en-US" dirty="0" err="1"/>
+              <a:t>CityGML</a:t>
+            </a:r>
+            <a:r>
+              <a:rPr lang="en-US" dirty="0"/>
+              <a:t> SWG. Both groups focus on urban models, UDT from a broad organizational and domain perspective, and </a:t>
+            </a:r>
+            <a:r>
+              <a:rPr lang="en-US" dirty="0" err="1"/>
+              <a:t>CityGML</a:t>
+            </a:r>
+            <a:r>
+              <a:rPr lang="en-US" dirty="0"/>
+              <a:t> from a narrower city model data format standard point of view. </a:t>
+            </a:r>
+          </a:p>
+          <a:p>
+            <a:r>
+              <a:rPr lang="en-US" dirty="0"/>
+              <a:t>There are hundreds of millions of real-world buildings and their environments modelled in </a:t>
+            </a:r>
+            <a:r>
+              <a:rPr lang="en-US" dirty="0" err="1"/>
+              <a:t>CityGML</a:t>
+            </a:r>
+            <a:r>
+              <a:rPr lang="en-US" dirty="0"/>
+              <a:t>.</a:t>
             </a:r>
           </a:p>
         </p:txBody>
@@ -4294,7 +4326,7 @@
           <a:p>
             <a:r>
               <a:rPr lang="en-US" dirty="0"/>
-              <a:t>About this Working Group</a:t>
+              <a:t>About these Working Groups</a:t>
             </a:r>
           </a:p>
         </p:txBody>
@@ -4358,7 +4390,15 @@
           <a:p>
             <a:r>
               <a:rPr lang="en-US" dirty="0"/>
-              <a:t>Tam Belayneh (ESRI): Gaussian splats [15 minutes]</a:t>
+              <a:t>Tam Belayneh (ESRI): </a:t>
+            </a:r>
+            <a:r>
+              <a:rPr lang="en-US" u="sng" dirty="0"/>
+              <a:t>Gaussian Splats </a:t>
+            </a:r>
+            <a:r>
+              <a:rPr lang="en-US" dirty="0"/>
+              <a:t>[15 minutes]</a:t>
             </a:r>
           </a:p>
           <a:p>
@@ -4372,7 +4412,83 @@
             </a:r>
             <a:r>
               <a:rPr lang="en-US" dirty="0"/>
-              <a:t> SWG) New Combined Monthly </a:t>
+              <a:t> SWG) </a:t>
+            </a:r>
+            <a:r>
+              <a:rPr lang="en-US" u="sng" dirty="0"/>
+              <a:t>New Combined Monthly </a:t>
+            </a:r>
+            <a:r>
+              <a:rPr lang="en-US" u="sng" dirty="0" err="1"/>
+              <a:t>CityGML</a:t>
+            </a:r>
+            <a:r>
+              <a:rPr lang="en-US" u="sng" dirty="0"/>
+              <a:t> Online Meetings</a:t>
+            </a:r>
+            <a:r>
+              <a:rPr lang="en-US" dirty="0"/>
+              <a:t>: [5 minutes]</a:t>
+            </a:r>
+          </a:p>
+          <a:p>
+            <a:r>
+              <a:rPr lang="en-US" dirty="0"/>
+              <a:t>Mei-Ling (Milly) Yeh, (Associate Professor, GIS Research Center, Feng Chia University)  </a:t>
+            </a:r>
+            <a:r>
+              <a:rPr lang="en-US" u="sng" dirty="0"/>
+              <a:t>Applications of Urban Digital Twins </a:t>
+            </a:r>
+            <a:r>
+              <a:rPr lang="en-US" dirty="0"/>
+              <a:t>[15 minutes]</a:t>
+            </a:r>
+          </a:p>
+          <a:p>
+            <a:r>
+              <a:rPr lang="en-US" dirty="0"/>
+              <a:t>Diego Diaz, (Software Engineer, Bentley Systems)</a:t>
+            </a:r>
+            <a:r>
+              <a:rPr lang="en-US" u="sng" dirty="0"/>
+              <a:t>BION Material Schema </a:t>
+            </a:r>
+            <a:r>
+              <a:rPr lang="en-US" dirty="0"/>
+              <a:t>[15 minutes]</a:t>
+            </a:r>
+          </a:p>
+          <a:p>
+            <a:r>
+              <a:rPr lang="en-US" dirty="0"/>
+              <a:t>Chikako Yasutaka, Yuka Sogawa (Asia Air Survey, MLIT): </a:t>
+            </a:r>
+            <a:r>
+              <a:rPr lang="en-US" u="sng" dirty="0" err="1"/>
+              <a:t>CityGML</a:t>
+            </a:r>
+            <a:r>
+              <a:rPr lang="en-US" u="sng" dirty="0"/>
+              <a:t> to </a:t>
+            </a:r>
+            <a:r>
+              <a:rPr lang="en-US" u="sng" dirty="0" err="1"/>
+              <a:t>glTF</a:t>
+            </a:r>
+            <a:r>
+              <a:rPr lang="en-US" u="sng" dirty="0"/>
+              <a:t> Conversion </a:t>
+            </a:r>
+            <a:r>
+              <a:rPr lang="en-US" dirty="0"/>
+              <a:t>[15 minutes]</a:t>
+            </a:r>
+          </a:p>
+          <a:p>
+            <a:r>
+              <a:rPr lang="en-US" dirty="0"/>
+              <a:t>Steve Smyth (</a:t>
             </a:r>
             <a:r>
               <a:rPr lang="en-US" dirty="0" err="1"/>
@@ -4380,102 +4496,39 @@
             </a:r>
             <a:r>
               <a:rPr lang="en-US" dirty="0"/>
-              <a:t> Online Meetings: [5 minutes]</a:t>
-            </a:r>
-          </a:p>
-          <a:p>
-            <a:pPr lvl="1"/>
-            <a:r>
-              <a:rPr lang="en-US" dirty="0" err="1"/>
+              <a:t> SWG): </a:t>
+            </a:r>
+            <a:r>
+              <a:rPr lang="en-US" u="sng" dirty="0"/>
+              <a:t>“Rendering” Hundreds of Millions of </a:t>
+            </a:r>
+            <a:r>
+              <a:rPr lang="en-US" u="sng" dirty="0" err="1"/>
               <a:t>CityGML</a:t>
             </a:r>
             <a:r>
-              <a:rPr lang="en-US" dirty="0"/>
-              <a:t> 3 Maintenance and Support</a:t>
-            </a:r>
-          </a:p>
-          <a:p>
-            <a:pPr lvl="1"/>
-            <a:r>
-              <a:rPr lang="en-US" dirty="0"/>
-              <a:t>3DCityGB and CityGML4J</a:t>
-            </a:r>
-          </a:p>
-          <a:p>
-            <a:pPr lvl="1"/>
-            <a:r>
-              <a:rPr lang="en-US" dirty="0" err="1"/>
-              <a:t>CityRDF</a:t>
-            </a:r>
-            <a:endParaRPr lang="en-US" dirty="0"/>
-          </a:p>
-          <a:p>
-            <a:pPr lvl="1"/>
-            <a:r>
-              <a:rPr lang="en-US" dirty="0" err="1"/>
-              <a:t>CityGML</a:t>
-            </a:r>
-            <a:r>
-              <a:rPr lang="en-US" dirty="0"/>
-              <a:t> SWG participation in creating a standard profile</a:t>
-            </a:r>
-          </a:p>
-          <a:p>
-            <a:r>
-              <a:rPr lang="en-US" dirty="0"/>
-              <a:t>Mei-Ling (Milly) Yeh, (Associate Professor, GIS Research Center, Feng Chia University)  Applications of Urban Digital Twins [15 minutes]</a:t>
-            </a:r>
-          </a:p>
-          <a:p>
-            <a:r>
-              <a:rPr lang="en-US" dirty="0"/>
-              <a:t>Chikako Yasutaka, Yuka Sogawa (Asia Air Survey, MLIT): </a:t>
-            </a:r>
-            <a:r>
-              <a:rPr lang="en-US" dirty="0" err="1"/>
-              <a:t>CityGML</a:t>
-            </a:r>
-            <a:r>
-              <a:rPr lang="en-US" dirty="0"/>
-              <a:t> to </a:t>
-            </a:r>
-            <a:r>
-              <a:rPr lang="en-US" dirty="0" err="1"/>
+              <a:rPr lang="en-US" u="sng" dirty="0"/>
+              <a:t> Building Models as </a:t>
+            </a:r>
+            <a:r>
+              <a:rPr lang="en-US" u="sng" dirty="0" err="1"/>
+              <a:t>GeoLocated</a:t>
+            </a:r>
+            <a:r>
+              <a:rPr lang="en-US" u="sng" dirty="0"/>
+              <a:t> and Posed </a:t>
+            </a:r>
+            <a:r>
+              <a:rPr lang="en-US" u="sng" dirty="0" err="1"/>
               <a:t>glTF</a:t>
             </a:r>
             <a:r>
-              <a:rPr lang="en-US" dirty="0"/>
-              <a:t> Conversion [15 minutes]</a:t>
-            </a:r>
-          </a:p>
-          <a:p>
-            <a:r>
-              <a:rPr lang="en-US" dirty="0"/>
-              <a:t>Steve Smyth (</a:t>
-            </a:r>
-            <a:r>
-              <a:rPr lang="en-US" dirty="0" err="1"/>
-              <a:t>CityGML</a:t>
-            </a:r>
-            <a:r>
-              <a:rPr lang="en-US" dirty="0"/>
-              <a:t> SWG): Rendering Millions of </a:t>
-            </a:r>
-            <a:r>
-              <a:rPr lang="en-US" dirty="0" err="1"/>
-              <a:t>CityGML</a:t>
-            </a:r>
-            <a:r>
-              <a:rPr lang="en-US" dirty="0"/>
-              <a:t> Building Models as </a:t>
-            </a:r>
-            <a:r>
-              <a:rPr lang="en-US" dirty="0" err="1"/>
-              <a:t>glTF</a:t>
-            </a:r>
-            <a:r>
-              <a:rPr lang="en-US" dirty="0"/>
-              <a:t>  [10 minutes]</a:t>
+              <a:rPr lang="en-US" u="sng" dirty="0"/>
+              <a:t>  </a:t>
+            </a:r>
+            <a:r>
+              <a:rPr lang="en-US" dirty="0"/>
+              <a:t>[10 minutes]</a:t>
             </a:r>
           </a:p>
           <a:p>
@@ -4751,6 +4804,19 @@
             <a:r>
               <a:rPr lang="en-US" dirty="0"/>
               <a:t>Mei-Ling (Milly) Yeh, (Associate Professor, GIS Research Center, Feng Chia University)  	Applications of Urban Digital Twins [15 minutes]</a:t>
+            </a:r>
+          </a:p>
+          <a:p>
+            <a:r>
+              <a:rPr lang="en-US" dirty="0"/>
+              <a:t>Diego Diaz, (Distinguished Software Engineer, Bentley Systems)</a:t>
+            </a:r>
+          </a:p>
+          <a:p>
+            <a:pPr lvl="1"/>
+            <a:r>
+              <a:rPr lang="en-US" dirty="0"/>
+              <a:t>BION Material Schema [15 minutes]</a:t>
             </a:r>
           </a:p>
           <a:p>
@@ -6193,14 +6259,12 @@
 </file>
 
 <file path=customXml/item1.xml><?xml version="1.0" encoding="utf-8"?>
-<p:properties xmlns:p="http://schemas.microsoft.com/office/2006/metadata/properties" xmlns:xsi="http://www.w3.org/2001/XMLSchema-instance" xmlns:pc="http://schemas.microsoft.com/office/infopath/2007/PartnerControls">
-  <documentManagement>
-    <TaxCatchAll xmlns="9d591f4a-b750-44ad-8ebf-06d36ba90675" xsi:nil="true"/>
-    <lcf76f155ced4ddcb4097134ff3c332f xmlns="d6fbc86c-d850-4140-ac77-9d31bd829bdd">
-      <Terms xmlns="http://schemas.microsoft.com/office/infopath/2007/PartnerControls"/>
-    </lcf76f155ced4ddcb4097134ff3c332f>
-  </documentManagement>
-</p:properties>
+<?mso-contentType ?>
+<FormTemplates xmlns="http://schemas.microsoft.com/sharepoint/v3/contenttype/forms">
+  <Display>DocumentLibraryForm</Display>
+  <Edit>DocumentLibraryForm</Edit>
+  <New>DocumentLibraryForm</New>
+</FormTemplates>
 </file>
 
 <file path=customXml/item2.xml><?xml version="1.0" encoding="utf-8"?>
@@ -6411,21 +6475,20 @@
 </file>
 
 <file path=customXml/item3.xml><?xml version="1.0" encoding="utf-8"?>
-<?mso-contentType ?>
-<FormTemplates xmlns="http://schemas.microsoft.com/sharepoint/v3/contenttype/forms">
-  <Display>DocumentLibraryForm</Display>
-  <Edit>DocumentLibraryForm</Edit>
-  <New>DocumentLibraryForm</New>
-</FormTemplates>
+<p:properties xmlns:p="http://schemas.microsoft.com/office/2006/metadata/properties" xmlns:xsi="http://www.w3.org/2001/XMLSchema-instance" xmlns:pc="http://schemas.microsoft.com/office/infopath/2007/PartnerControls">
+  <documentManagement>
+    <TaxCatchAll xmlns="9d591f4a-b750-44ad-8ebf-06d36ba90675" xsi:nil="true"/>
+    <lcf76f155ced4ddcb4097134ff3c332f xmlns="d6fbc86c-d850-4140-ac77-9d31bd829bdd">
+      <Terms xmlns="http://schemas.microsoft.com/office/infopath/2007/PartnerControls"/>
+    </lcf76f155ced4ddcb4097134ff3c332f>
+  </documentManagement>
+</p:properties>
 </file>
 
 <file path=customXml/itemProps1.xml><?xml version="1.0" encoding="utf-8"?>
-<ds:datastoreItem xmlns:ds="http://schemas.openxmlformats.org/officeDocument/2006/customXml" ds:itemID="{4B83FC41-384C-4416-9A4E-6653321403C3}">
+<ds:datastoreItem xmlns:ds="http://schemas.openxmlformats.org/officeDocument/2006/customXml" ds:itemID="{A028D80A-D8F1-4E9F-96FE-EDED6B38411B}">
   <ds:schemaRefs>
-    <ds:schemaRef ds:uri="http://schemas.microsoft.com/office/2006/metadata/properties"/>
-    <ds:schemaRef ds:uri="http://schemas.microsoft.com/office/infopath/2007/PartnerControls"/>
-    <ds:schemaRef ds:uri="9d591f4a-b750-44ad-8ebf-06d36ba90675"/>
-    <ds:schemaRef ds:uri="d6fbc86c-d850-4140-ac77-9d31bd829bdd"/>
+    <ds:schemaRef ds:uri="http://schemas.microsoft.com/sharepoint/v3/contenttype/forms"/>
   </ds:schemaRefs>
 </ds:datastoreItem>
 </file>
@@ -6450,9 +6513,12 @@
 </file>
 
 <file path=customXml/itemProps3.xml><?xml version="1.0" encoding="utf-8"?>
-<ds:datastoreItem xmlns:ds="http://schemas.openxmlformats.org/officeDocument/2006/customXml" ds:itemID="{A028D80A-D8F1-4E9F-96FE-EDED6B38411B}">
+<ds:datastoreItem xmlns:ds="http://schemas.openxmlformats.org/officeDocument/2006/customXml" ds:itemID="{4B83FC41-384C-4416-9A4E-6653321403C3}">
   <ds:schemaRefs>
-    <ds:schemaRef ds:uri="http://schemas.microsoft.com/sharepoint/v3/contenttype/forms"/>
+    <ds:schemaRef ds:uri="http://schemas.microsoft.com/office/2006/metadata/properties"/>
+    <ds:schemaRef ds:uri="http://schemas.microsoft.com/office/infopath/2007/PartnerControls"/>
+    <ds:schemaRef ds:uri="9d591f4a-b750-44ad-8ebf-06d36ba90675"/>
+    <ds:schemaRef ds:uri="d6fbc86c-d850-4140-ac77-9d31bd829bdd"/>
   </ds:schemaRefs>
 </ds:datastoreItem>
 </file>